--- a/docs/pptx/week-3-platform-training.pptx
+++ b/docs/pptx/week-3-platform-training.pptx
@@ -7624,7 +7624,7 @@
         <p:spPr>
           <a:xfrm>
             <a:off x="640080" y="1005840"/>
-            <a:ext cx="10911535" cy="1097280"/>
+            <a:ext cx="10911535" cy="777240"/>
           </a:xfrm>
           <a:prstGeom prst="rect">
             <a:avLst/>
@@ -7662,7 +7662,7 @@
         </p:nvSpPr>
         <p:spPr>
           <a:xfrm>
-            <a:off x="640080" y="1965960"/>
+            <a:off x="640080" y="1874520"/>
             <a:ext cx="1280160" cy="38100"/>
           </a:xfrm>
           <a:prstGeom prst="rect">
@@ -7706,8 +7706,8 @@
         </p:nvSpPr>
         <p:spPr>
           <a:xfrm>
-            <a:off x="640080" y="2286000"/>
-            <a:ext cx="10911535" cy="3931920"/>
+            <a:off x="640080" y="2194560"/>
+            <a:ext cx="10911535" cy="4023360"/>
           </a:xfrm>
           <a:prstGeom prst="rect">
             <a:avLst/>
@@ -12772,7 +12772,7 @@
         <p:spPr>
           <a:xfrm>
             <a:off x="640080" y="1005840"/>
-            <a:ext cx="10911535" cy="1097280"/>
+            <a:ext cx="10911535" cy="777240"/>
           </a:xfrm>
           <a:prstGeom prst="rect">
             <a:avLst/>
@@ -12810,7 +12810,7 @@
         </p:nvSpPr>
         <p:spPr>
           <a:xfrm>
-            <a:off x="640080" y="1965960"/>
+            <a:off x="640080" y="1874520"/>
             <a:ext cx="1280160" cy="38100"/>
           </a:xfrm>
           <a:prstGeom prst="rect">
@@ -12854,7 +12854,7 @@
         </p:nvSpPr>
         <p:spPr>
           <a:xfrm>
-            <a:off x="640080" y="2286000"/>
+            <a:off x="640080" y="2194560"/>
             <a:ext cx="5227167" cy="365760"/>
           </a:xfrm>
           <a:prstGeom prst="rect">
@@ -12889,7 +12889,7 @@
         </p:nvSpPr>
         <p:spPr>
           <a:xfrm>
-            <a:off x="640080" y="2615184"/>
+            <a:off x="640080" y="2523744"/>
             <a:ext cx="5227167" cy="12700"/>
           </a:xfrm>
           <a:prstGeom prst="rect">
@@ -12933,8 +12933,8 @@
         </p:nvSpPr>
         <p:spPr>
           <a:xfrm>
-            <a:off x="640080" y="2743200"/>
-            <a:ext cx="5227167" cy="3474720"/>
+            <a:off x="640080" y="2651760"/>
+            <a:ext cx="5227167" cy="3566160"/>
           </a:xfrm>
           <a:prstGeom prst="rect">
             <a:avLst/>
@@ -13065,7 +13065,7 @@
         </p:nvSpPr>
         <p:spPr>
           <a:xfrm>
-            <a:off x="6324447" y="2286000"/>
+            <a:off x="6324447" y="2194560"/>
             <a:ext cx="5227167" cy="365760"/>
           </a:xfrm>
           <a:prstGeom prst="rect">
@@ -13100,7 +13100,7 @@
         </p:nvSpPr>
         <p:spPr>
           <a:xfrm>
-            <a:off x="6324447" y="2615184"/>
+            <a:off x="6324447" y="2523744"/>
             <a:ext cx="5227167" cy="12700"/>
           </a:xfrm>
           <a:prstGeom prst="rect">
@@ -13144,8 +13144,8 @@
         </p:nvSpPr>
         <p:spPr>
           <a:xfrm>
-            <a:off x="6324447" y="2743200"/>
-            <a:ext cx="5227167" cy="3474720"/>
+            <a:off x="6324447" y="2651760"/>
+            <a:ext cx="5227167" cy="3566160"/>
           </a:xfrm>
           <a:prstGeom prst="rect">
             <a:avLst/>
@@ -19726,7 +19726,7 @@
         <p:spPr>
           <a:xfrm>
             <a:off x="640080" y="1005840"/>
-            <a:ext cx="10911535" cy="1097280"/>
+            <a:ext cx="10911535" cy="777240"/>
           </a:xfrm>
           <a:prstGeom prst="rect">
             <a:avLst/>
@@ -19764,7 +19764,7 @@
         </p:nvSpPr>
         <p:spPr>
           <a:xfrm>
-            <a:off x="640080" y="1965960"/>
+            <a:off x="640080" y="1874520"/>
             <a:ext cx="1280160" cy="38100"/>
           </a:xfrm>
           <a:prstGeom prst="rect">
@@ -19808,8 +19808,8 @@
         </p:nvSpPr>
         <p:spPr>
           <a:xfrm>
-            <a:off x="640080" y="2286000"/>
-            <a:ext cx="10911535" cy="3931920"/>
+            <a:off x="640080" y="2194560"/>
+            <a:ext cx="10911535" cy="4023360"/>
           </a:xfrm>
           <a:prstGeom prst="rect">
             <a:avLst/>
@@ -20277,7 +20277,7 @@
         <p:spPr>
           <a:xfrm>
             <a:off x="640080" y="1005840"/>
-            <a:ext cx="10911535" cy="1097280"/>
+            <a:ext cx="10911535" cy="1143000"/>
           </a:xfrm>
           <a:prstGeom prst="rect">
             <a:avLst/>
@@ -20315,7 +20315,7 @@
         </p:nvSpPr>
         <p:spPr>
           <a:xfrm>
-            <a:off x="640080" y="1965960"/>
+            <a:off x="640080" y="2240280"/>
             <a:ext cx="1280160" cy="38100"/>
           </a:xfrm>
           <a:prstGeom prst="rect">
@@ -20359,8 +20359,8 @@
         </p:nvSpPr>
         <p:spPr>
           <a:xfrm>
-            <a:off x="640080" y="2286000"/>
-            <a:ext cx="10911535" cy="3931920"/>
+            <a:off x="640080" y="2560320"/>
+            <a:ext cx="10911535" cy="3657600"/>
           </a:xfrm>
           <a:prstGeom prst="rect">
             <a:avLst/>
@@ -20800,7 +20800,7 @@
         <p:spPr>
           <a:xfrm>
             <a:off x="640080" y="1005840"/>
-            <a:ext cx="10911535" cy="1097280"/>
+            <a:ext cx="10911535" cy="777240"/>
           </a:xfrm>
           <a:prstGeom prst="rect">
             <a:avLst/>
@@ -20838,7 +20838,7 @@
         </p:nvSpPr>
         <p:spPr>
           <a:xfrm>
-            <a:off x="640080" y="1965960"/>
+            <a:off x="640080" y="1874520"/>
             <a:ext cx="1280160" cy="38100"/>
           </a:xfrm>
           <a:prstGeom prst="rect">
@@ -20882,8 +20882,8 @@
         </p:nvSpPr>
         <p:spPr>
           <a:xfrm>
-            <a:off x="640080" y="2286000"/>
-            <a:ext cx="10911535" cy="3931920"/>
+            <a:off x="640080" y="2194560"/>
+            <a:ext cx="10911535" cy="4023360"/>
           </a:xfrm>
           <a:prstGeom prst="rect">
             <a:avLst/>
@@ -23903,7 +23903,7 @@
         <p:spPr>
           <a:xfrm>
             <a:off x="640080" y="1005840"/>
-            <a:ext cx="10911535" cy="1097280"/>
+            <a:ext cx="10911535" cy="777240"/>
           </a:xfrm>
           <a:prstGeom prst="rect">
             <a:avLst/>
@@ -23941,7 +23941,7 @@
         </p:nvSpPr>
         <p:spPr>
           <a:xfrm>
-            <a:off x="640080" y="1965960"/>
+            <a:off x="640080" y="1874520"/>
             <a:ext cx="1280160" cy="38100"/>
           </a:xfrm>
           <a:prstGeom prst="rect">
@@ -23985,7 +23985,7 @@
         </p:nvSpPr>
         <p:spPr>
           <a:xfrm>
-            <a:off x="640080" y="2286000"/>
+            <a:off x="640080" y="2194560"/>
             <a:ext cx="5227167" cy="365760"/>
           </a:xfrm>
           <a:prstGeom prst="rect">
@@ -24020,7 +24020,7 @@
         </p:nvSpPr>
         <p:spPr>
           <a:xfrm>
-            <a:off x="640080" y="2615184"/>
+            <a:off x="640080" y="2523744"/>
             <a:ext cx="5227167" cy="12700"/>
           </a:xfrm>
           <a:prstGeom prst="rect">
@@ -24064,8 +24064,8 @@
         </p:nvSpPr>
         <p:spPr>
           <a:xfrm>
-            <a:off x="640080" y="2743200"/>
-            <a:ext cx="5227167" cy="3474720"/>
+            <a:off x="640080" y="2651760"/>
+            <a:ext cx="5227167" cy="3566160"/>
           </a:xfrm>
           <a:prstGeom prst="rect">
             <a:avLst/>
@@ -24196,7 +24196,7 @@
         </p:nvSpPr>
         <p:spPr>
           <a:xfrm>
-            <a:off x="6324447" y="2286000"/>
+            <a:off x="6324447" y="2194560"/>
             <a:ext cx="5227167" cy="365760"/>
           </a:xfrm>
           <a:prstGeom prst="rect">
@@ -24231,7 +24231,7 @@
         </p:nvSpPr>
         <p:spPr>
           <a:xfrm>
-            <a:off x="6324447" y="2615184"/>
+            <a:off x="6324447" y="2523744"/>
             <a:ext cx="5227167" cy="12700"/>
           </a:xfrm>
           <a:prstGeom prst="rect">
@@ -24275,8 +24275,8 @@
         </p:nvSpPr>
         <p:spPr>
           <a:xfrm>
-            <a:off x="6324447" y="2743200"/>
-            <a:ext cx="5227167" cy="3474720"/>
+            <a:off x="6324447" y="2651760"/>
+            <a:ext cx="5227167" cy="3566160"/>
           </a:xfrm>
           <a:prstGeom prst="rect">
             <a:avLst/>
@@ -24613,7 +24613,7 @@
         <p:spPr>
           <a:xfrm>
             <a:off x="640080" y="1005840"/>
-            <a:ext cx="10911535" cy="1097280"/>
+            <a:ext cx="10911535" cy="1143000"/>
           </a:xfrm>
           <a:prstGeom prst="rect">
             <a:avLst/>
@@ -24651,7 +24651,7 @@
         </p:nvSpPr>
         <p:spPr>
           <a:xfrm>
-            <a:off x="640080" y="1965960"/>
+            <a:off x="640080" y="2240280"/>
             <a:ext cx="1280160" cy="38100"/>
           </a:xfrm>
           <a:prstGeom prst="rect">
@@ -24695,7 +24695,7 @@
         </p:nvSpPr>
         <p:spPr>
           <a:xfrm>
-            <a:off x="640080" y="2286000"/>
+            <a:off x="640080" y="2560320"/>
             <a:ext cx="5227167" cy="365760"/>
           </a:xfrm>
           <a:prstGeom prst="rect">
@@ -24730,7 +24730,7 @@
         </p:nvSpPr>
         <p:spPr>
           <a:xfrm>
-            <a:off x="640080" y="2615184"/>
+            <a:off x="640080" y="2889504"/>
             <a:ext cx="5227167" cy="12700"/>
           </a:xfrm>
           <a:prstGeom prst="rect">
@@ -24774,8 +24774,8 @@
         </p:nvSpPr>
         <p:spPr>
           <a:xfrm>
-            <a:off x="640080" y="2743200"/>
-            <a:ext cx="5227167" cy="3474720"/>
+            <a:off x="640080" y="3017520"/>
+            <a:ext cx="5227167" cy="3200400"/>
           </a:xfrm>
           <a:prstGeom prst="rect">
             <a:avLst/>
@@ -24897,7 +24897,7 @@
         </p:nvSpPr>
         <p:spPr>
           <a:xfrm>
-            <a:off x="6324447" y="2286000"/>
+            <a:off x="6324447" y="2560320"/>
             <a:ext cx="5227167" cy="365760"/>
           </a:xfrm>
           <a:prstGeom prst="rect">
@@ -24932,7 +24932,7 @@
         </p:nvSpPr>
         <p:spPr>
           <a:xfrm>
-            <a:off x="6324447" y="2615184"/>
+            <a:off x="6324447" y="2889504"/>
             <a:ext cx="5227167" cy="12700"/>
           </a:xfrm>
           <a:prstGeom prst="rect">
@@ -24976,8 +24976,8 @@
         </p:nvSpPr>
         <p:spPr>
           <a:xfrm>
-            <a:off x="6324447" y="2743200"/>
-            <a:ext cx="5227167" cy="3474720"/>
+            <a:off x="6324447" y="3017520"/>
+            <a:ext cx="5227167" cy="3200400"/>
           </a:xfrm>
           <a:prstGeom prst="rect">
             <a:avLst/>
@@ -25342,7 +25342,7 @@
         <p:spPr>
           <a:xfrm>
             <a:off x="640080" y="1005840"/>
-            <a:ext cx="10911535" cy="1097280"/>
+            <a:ext cx="10911535" cy="1143000"/>
           </a:xfrm>
           <a:prstGeom prst="rect">
             <a:avLst/>
@@ -25380,7 +25380,7 @@
         </p:nvSpPr>
         <p:spPr>
           <a:xfrm>
-            <a:off x="640080" y="1965960"/>
+            <a:off x="640080" y="2240280"/>
             <a:ext cx="1280160" cy="38100"/>
           </a:xfrm>
           <a:prstGeom prst="rect">
@@ -25424,7 +25424,7 @@
         </p:nvSpPr>
         <p:spPr>
           <a:xfrm>
-            <a:off x="640080" y="2286000"/>
+            <a:off x="640080" y="2560320"/>
             <a:ext cx="5227167" cy="365760"/>
           </a:xfrm>
           <a:prstGeom prst="rect">
@@ -25459,7 +25459,7 @@
         </p:nvSpPr>
         <p:spPr>
           <a:xfrm>
-            <a:off x="640080" y="2615184"/>
+            <a:off x="640080" y="2889504"/>
             <a:ext cx="5227167" cy="12700"/>
           </a:xfrm>
           <a:prstGeom prst="rect">
@@ -25503,8 +25503,8 @@
         </p:nvSpPr>
         <p:spPr>
           <a:xfrm>
-            <a:off x="640080" y="2743200"/>
-            <a:ext cx="5227167" cy="3474720"/>
+            <a:off x="640080" y="3017520"/>
+            <a:ext cx="5227167" cy="3200400"/>
           </a:xfrm>
           <a:prstGeom prst="rect">
             <a:avLst/>
@@ -25579,7 +25579,7 @@
         </p:nvSpPr>
         <p:spPr>
           <a:xfrm>
-            <a:off x="6324447" y="2286000"/>
+            <a:off x="6324447" y="2560320"/>
             <a:ext cx="5227167" cy="365760"/>
           </a:xfrm>
           <a:prstGeom prst="rect">
@@ -25614,7 +25614,7 @@
         </p:nvSpPr>
         <p:spPr>
           <a:xfrm>
-            <a:off x="6324447" y="2615184"/>
+            <a:off x="6324447" y="2889504"/>
             <a:ext cx="5227167" cy="12700"/>
           </a:xfrm>
           <a:prstGeom prst="rect">
@@ -25658,8 +25658,8 @@
         </p:nvSpPr>
         <p:spPr>
           <a:xfrm>
-            <a:off x="6324447" y="2743200"/>
-            <a:ext cx="5227167" cy="3474720"/>
+            <a:off x="6324447" y="3017520"/>
+            <a:ext cx="5227167" cy="3200400"/>
           </a:xfrm>
           <a:prstGeom prst="rect">
             <a:avLst/>
